--- a/Calendario2026/Ejercicios/E2_VLAN/Ejer2_VLANs.pptx
+++ b/Calendario2026/Ejercicios/E2_VLAN/Ejer2_VLANs.pptx
@@ -138,37 +138,82 @@
 </p:presentation>
 </file>
 
+<file path=ppt/revisionInfo.xml><?xml version="1.0" encoding="utf-8"?>
+<p1510:revInfo xmlns:a="http://schemas.openxmlformats.org/drawingml/2006/main" xmlns:r="http://schemas.openxmlformats.org/officeDocument/2006/relationships" xmlns:p1510="http://schemas.microsoft.com/office/powerpoint/2015/10/main">
+  <p1510:revLst>
+    <p1510:client id="{37B6C174-159D-4F38-87E0-B71FD639C87F}" v="7" dt="2026-03-24T18:10:32.428"/>
+  </p1510:revLst>
+</p1510:revInfo>
+</file>
+
 <file path=ppt/changesInfos/changesInfo1.xml><?xml version="1.0" encoding="utf-8"?>
 <pc:chgInfo xmlns:a="http://schemas.openxmlformats.org/drawingml/2006/main" xmlns:r="http://schemas.openxmlformats.org/officeDocument/2006/relationships" xmlns:ac="http://schemas.microsoft.com/office/drawing/2013/main/command" xmlns:pc="http://schemas.microsoft.com/office/powerpoint/2013/main/command">
   <pc:docChgLst>
     <pc:chgData name="Lizethe Pérez Fuertes" userId="4ae9ef87-2a7d-42f8-8dfa-0a501a9e2ff4" providerId="ADAL" clId="{FDDD45CB-1330-4033-A842-3D2746AFF7C7}"/>
-    <pc:docChg chg="modSld">
-      <pc:chgData name="Lizethe Pérez Fuertes" userId="4ae9ef87-2a7d-42f8-8dfa-0a501a9e2ff4" providerId="ADAL" clId="{FDDD45CB-1330-4033-A842-3D2746AFF7C7}" dt="2025-09-24T14:34:50.114" v="3" actId="6549"/>
+    <pc:docChg chg="custSel modSld">
+      <pc:chgData name="Lizethe Pérez Fuertes" userId="4ae9ef87-2a7d-42f8-8dfa-0a501a9e2ff4" providerId="ADAL" clId="{FDDD45CB-1330-4033-A842-3D2746AFF7C7}" dt="2026-03-24T22:22:29.149" v="284" actId="6549"/>
       <pc:docMkLst>
         <pc:docMk/>
       </pc:docMkLst>
       <pc:sldChg chg="modSp mod">
-        <pc:chgData name="Lizethe Pérez Fuertes" userId="4ae9ef87-2a7d-42f8-8dfa-0a501a9e2ff4" providerId="ADAL" clId="{FDDD45CB-1330-4033-A842-3D2746AFF7C7}" dt="2025-09-24T14:34:50.114" v="3" actId="6549"/>
+        <pc:chgData name="Lizethe Pérez Fuertes" userId="4ae9ef87-2a7d-42f8-8dfa-0a501a9e2ff4" providerId="ADAL" clId="{FDDD45CB-1330-4033-A842-3D2746AFF7C7}" dt="2026-03-24T22:04:02.255" v="268" actId="20577"/>
         <pc:sldMkLst>
           <pc:docMk/>
-          <pc:sldMk cId="1366278812" sldId="350"/>
+          <pc:sldMk cId="0" sldId="261"/>
         </pc:sldMkLst>
         <pc:spChg chg="mod">
-          <ac:chgData name="Lizethe Pérez Fuertes" userId="4ae9ef87-2a7d-42f8-8dfa-0a501a9e2ff4" providerId="ADAL" clId="{FDDD45CB-1330-4033-A842-3D2746AFF7C7}" dt="2025-09-24T14:34:16.293" v="1" actId="6549"/>
+          <ac:chgData name="Lizethe Pérez Fuertes" userId="4ae9ef87-2a7d-42f8-8dfa-0a501a9e2ff4" providerId="ADAL" clId="{FDDD45CB-1330-4033-A842-3D2746AFF7C7}" dt="2026-03-24T22:04:02.255" v="268" actId="20577"/>
           <ac:spMkLst>
             <pc:docMk/>
-            <pc:sldMk cId="1366278812" sldId="350"/>
-            <ac:spMk id="5" creationId="{9D99F20F-671A-41D1-8D5A-1D575E79056A}"/>
+            <pc:sldMk cId="0" sldId="261"/>
+            <ac:spMk id="2" creationId="{00000000-0000-0000-0000-000000000000}"/>
           </ac:spMkLst>
         </pc:spChg>
+      </pc:sldChg>
+      <pc:sldChg chg="modSp mod">
+        <pc:chgData name="Lizethe Pérez Fuertes" userId="4ae9ef87-2a7d-42f8-8dfa-0a501a9e2ff4" providerId="ADAL" clId="{FDDD45CB-1330-4033-A842-3D2746AFF7C7}" dt="2026-03-24T22:21:51.130" v="272" actId="20577"/>
+        <pc:sldMkLst>
+          <pc:docMk/>
+          <pc:sldMk cId="536682890" sldId="340"/>
+        </pc:sldMkLst>
         <pc:spChg chg="mod">
-          <ac:chgData name="Lizethe Pérez Fuertes" userId="4ae9ef87-2a7d-42f8-8dfa-0a501a9e2ff4" providerId="ADAL" clId="{FDDD45CB-1330-4033-A842-3D2746AFF7C7}" dt="2025-09-24T14:34:50.114" v="3" actId="6549"/>
+          <ac:chgData name="Lizethe Pérez Fuertes" userId="4ae9ef87-2a7d-42f8-8dfa-0a501a9e2ff4" providerId="ADAL" clId="{FDDD45CB-1330-4033-A842-3D2746AFF7C7}" dt="2026-03-24T22:21:51.130" v="272" actId="20577"/>
           <ac:spMkLst>
             <pc:docMk/>
-            <pc:sldMk cId="1366278812" sldId="350"/>
-            <ac:spMk id="7" creationId="{9FEB6DB2-BC53-41ED-8E85-70CA00123834}"/>
+            <pc:sldMk cId="536682890" sldId="340"/>
+            <ac:spMk id="14" creationId="{7646E0FB-7123-46AC-A020-B0A72B7A742A}"/>
           </ac:spMkLst>
         </pc:spChg>
+      </pc:sldChg>
+      <pc:sldChg chg="modSp mod">
+        <pc:chgData name="Lizethe Pérez Fuertes" userId="4ae9ef87-2a7d-42f8-8dfa-0a501a9e2ff4" providerId="ADAL" clId="{FDDD45CB-1330-4033-A842-3D2746AFF7C7}" dt="2026-03-24T22:22:02.963" v="278" actId="6549"/>
+        <pc:sldMkLst>
+          <pc:docMk/>
+          <pc:sldMk cId="1245641084" sldId="347"/>
+        </pc:sldMkLst>
+        <pc:graphicFrameChg chg="modGraphic">
+          <ac:chgData name="Lizethe Pérez Fuertes" userId="4ae9ef87-2a7d-42f8-8dfa-0a501a9e2ff4" providerId="ADAL" clId="{FDDD45CB-1330-4033-A842-3D2746AFF7C7}" dt="2026-03-24T22:22:02.963" v="278" actId="6549"/>
+          <ac:graphicFrameMkLst>
+            <pc:docMk/>
+            <pc:sldMk cId="1245641084" sldId="347"/>
+            <ac:graphicFrameMk id="5" creationId="{D5DA73BA-9C18-4089-BD14-C3684A90530F}"/>
+          </ac:graphicFrameMkLst>
+        </pc:graphicFrameChg>
+      </pc:sldChg>
+      <pc:sldChg chg="modSp mod">
+        <pc:chgData name="Lizethe Pérez Fuertes" userId="4ae9ef87-2a7d-42f8-8dfa-0a501a9e2ff4" providerId="ADAL" clId="{FDDD45CB-1330-4033-A842-3D2746AFF7C7}" dt="2026-03-24T22:22:29.149" v="284" actId="6549"/>
+        <pc:sldMkLst>
+          <pc:docMk/>
+          <pc:sldMk cId="1392632694" sldId="360"/>
+        </pc:sldMkLst>
+        <pc:graphicFrameChg chg="mod modGraphic">
+          <ac:chgData name="Lizethe Pérez Fuertes" userId="4ae9ef87-2a7d-42f8-8dfa-0a501a9e2ff4" providerId="ADAL" clId="{FDDD45CB-1330-4033-A842-3D2746AFF7C7}" dt="2026-03-24T22:22:29.149" v="284" actId="6549"/>
+          <ac:graphicFrameMkLst>
+            <pc:docMk/>
+            <pc:sldMk cId="1392632694" sldId="360"/>
+            <ac:graphicFrameMk id="3" creationId="{D4EF5B48-9283-3FB1-AEA0-33B024D5E95A}"/>
+          </ac:graphicFrameMkLst>
+        </pc:graphicFrameChg>
       </pc:sldChg>
     </pc:docChg>
   </pc:docChgLst>
@@ -1224,7 +1269,7 @@
           <a:p>
             <a:fld id="{1D8BD707-D9CF-40AE-B4C6-C98DA3205C09}" type="datetimeFigureOut">
               <a:rPr lang="en-US"/>
-              <a:t>9/24/2025</a:t>
+              <a:t>3/24/2026</a:t>
             </a:fld>
             <a:endParaRPr lang="en-US" dirty="0"/>
           </a:p>
@@ -1401,7 +1446,7 @@
           <a:p>
             <a:fld id="{1D8BD707-D9CF-40AE-B4C6-C98DA3205C09}" type="datetimeFigureOut">
               <a:rPr lang="en-US"/>
-              <a:t>9/24/2025</a:t>
+              <a:t>3/24/2026</a:t>
             </a:fld>
             <a:endParaRPr lang="en-US" dirty="0"/>
           </a:p>
@@ -1615,7 +1660,7 @@
           <a:p>
             <a:fld id="{1D8BD707-D9CF-40AE-B4C6-C98DA3205C09}" type="datetimeFigureOut">
               <a:rPr lang="en-US"/>
-              <a:t>9/24/2025</a:t>
+              <a:t>3/24/2026</a:t>
             </a:fld>
             <a:endParaRPr lang="en-US" dirty="0"/>
           </a:p>
@@ -1763,7 +1808,7 @@
           <a:p>
             <a:fld id="{1D8BD707-D9CF-40AE-B4C6-C98DA3205C09}" type="datetimeFigureOut">
               <a:rPr lang="en-US"/>
-              <a:t>9/24/2025</a:t>
+              <a:t>3/24/2026</a:t>
             </a:fld>
             <a:endParaRPr lang="en-US" dirty="0"/>
           </a:p>
@@ -1919,7 +1964,7 @@
           <a:p>
             <a:fld id="{1D8BD707-D9CF-40AE-B4C6-C98DA3205C09}" type="datetimeFigureOut">
               <a:rPr lang="en-US"/>
-              <a:t>9/24/2025</a:t>
+              <a:t>3/24/2026</a:t>
             </a:fld>
             <a:endParaRPr lang="en-US" dirty="0"/>
           </a:p>
@@ -2004,7 +2049,7 @@
           <a:p>
             <a:fld id="{5E75A0DC-66C6-4CEC-A5EB-F8C97CEC3796}" type="datetimeFigureOut">
               <a:rPr lang="es-MX" smtClean="0"/>
-              <a:t>24/09/2025</a:t>
+              <a:t>24/03/2026</a:t>
             </a:fld>
             <a:endParaRPr lang="es-MX" dirty="0"/>
           </a:p>
@@ -2261,7 +2306,7 @@
           <a:p>
             <a:fld id="{5E75A0DC-66C6-4CEC-A5EB-F8C97CEC3796}" type="datetimeFigureOut">
               <a:rPr lang="es-MX" smtClean="0"/>
-              <a:t>24/09/2025</a:t>
+              <a:t>24/03/2026</a:t>
             </a:fld>
             <a:endParaRPr lang="es-MX" dirty="0"/>
           </a:p>
@@ -2511,7 +2556,7 @@
           <a:p>
             <a:fld id="{1D8BD707-D9CF-40AE-B4C6-C98DA3205C09}" type="datetimeFigureOut">
               <a:rPr lang="en-US"/>
-              <a:t>9/24/2025</a:t>
+              <a:t>3/24/2026</a:t>
             </a:fld>
             <a:endParaRPr lang="en-US" dirty="0"/>
           </a:p>
@@ -7101,6 +7146,13 @@
               <a:t>r</a:t>
             </a:r>
             <a:r>
+              <a:rPr lang="es-MX" sz="1600" spc="-210" dirty="0">
+                <a:latin typeface="Arial" panose="020B0604020202020204" pitchFamily="34" charset="0"/>
+                <a:cs typeface="Arial" panose="020B0604020202020204" pitchFamily="34" charset="0"/>
+              </a:rPr>
+              <a:t>s</a:t>
+            </a:r>
+            <a:r>
               <a:rPr sz="1600" spc="-10" dirty="0">
                 <a:latin typeface="Arial" panose="020B0604020202020204" pitchFamily="34" charset="0"/>
                 <a:cs typeface="Arial" panose="020B0604020202020204" pitchFamily="34" charset="0"/>
@@ -8042,7 +8094,7 @@
           <p:nvPr>
             <p:extLst>
               <p:ext uri="{D42A27DB-BD31-4B8C-83A1-F6EECF244321}">
-                <p14:modId xmlns:p14="http://schemas.microsoft.com/office/powerpoint/2010/main" val="300173855"/>
+                <p14:modId xmlns:p14="http://schemas.microsoft.com/office/powerpoint/2010/main" val="63459820"/>
               </p:ext>
             </p:extLst>
           </p:nvPr>
@@ -8615,7 +8667,7 @@
                           <a:latin typeface="Arial" panose="020B0604020202020204" pitchFamily="34" charset="0"/>
                           <a:cs typeface="Arial" panose="020B0604020202020204" pitchFamily="34" charset="0"/>
                         </a:rPr>
-                        <a:t>Management</a:t>
+                        <a:t>Managers</a:t>
                       </a:r>
                       <a:endParaRPr lang="es-MX" sz="1400" b="1" dirty="0">
                         <a:solidFill>
@@ -8626,142 +8678,6 @@
                         <a:ea typeface="Calibri" panose="020F0502020204030204" pitchFamily="34" charset="0"/>
                         <a:cs typeface="Arial" panose="020B0604020202020204" pitchFamily="34" charset="0"/>
                       </a:endParaRPr>
-                    </a:p>
-                  </a:txBody>
-                  <a:tcPr marL="0" marR="0" marT="0" marB="0" anchor="ctr">
-                    <a:lnL w="12700" cap="flat" cmpd="sng" algn="ctr">
-                      <a:solidFill>
-                        <a:schemeClr val="tx1"/>
-                      </a:solidFill>
-                      <a:prstDash val="solid"/>
-                      <a:round/>
-                      <a:headEnd type="none" w="med" len="med"/>
-                      <a:tailEnd type="none" w="med" len="med"/>
-                    </a:lnL>
-                    <a:lnR w="12700" cap="flat" cmpd="sng" algn="ctr">
-                      <a:solidFill>
-                        <a:schemeClr val="tx1"/>
-                      </a:solidFill>
-                      <a:prstDash val="solid"/>
-                      <a:round/>
-                      <a:headEnd type="none" w="med" len="med"/>
-                      <a:tailEnd type="none" w="med" len="med"/>
-                    </a:lnR>
-                    <a:lnT w="12700" cap="flat" cmpd="sng" algn="ctr">
-                      <a:solidFill>
-                        <a:schemeClr val="tx1"/>
-                      </a:solidFill>
-                      <a:prstDash val="solid"/>
-                      <a:round/>
-                      <a:headEnd type="none" w="med" len="med"/>
-                      <a:tailEnd type="none" w="med" len="med"/>
-                    </a:lnT>
-                    <a:lnB w="12700" cap="flat" cmpd="sng" algn="ctr">
-                      <a:solidFill>
-                        <a:schemeClr val="tx1"/>
-                      </a:solidFill>
-                      <a:prstDash val="solid"/>
-                      <a:round/>
-                      <a:headEnd type="none" w="med" len="med"/>
-                      <a:tailEnd type="none" w="med" len="med"/>
-                    </a:lnB>
-                    <a:noFill/>
-                  </a:tcPr>
-                </a:tc>
-                <a:tc>
-                  <a:txBody>
-                    <a:bodyPr/>
-                    <a:lstStyle/>
-                    <a:p>
-                      <a:pPr marL="3810" algn="ctr">
-                        <a:lnSpc>
-                          <a:spcPts val="1800"/>
-                        </a:lnSpc>
-                      </a:pPr>
-                      <a:r>
-                        <a:rPr lang="es-MX" sz="1400" b="0" spc="-5" dirty="0">
-                          <a:solidFill>
-                            <a:schemeClr val="tx1"/>
-                          </a:solidFill>
-                          <a:effectLst/>
-                          <a:latin typeface="Arial" panose="020B0604020202020204" pitchFamily="34" charset="0"/>
-                          <a:cs typeface="Arial" panose="020B0604020202020204" pitchFamily="34" charset="0"/>
-                        </a:rPr>
-                        <a:t>10</a:t>
-                      </a:r>
-                      <a:endParaRPr lang="es-MX" sz="1400" b="0" dirty="0">
-                        <a:solidFill>
-                          <a:schemeClr val="tx1"/>
-                        </a:solidFill>
-                        <a:effectLst/>
-                        <a:latin typeface="Arial" panose="020B0604020202020204" pitchFamily="34" charset="0"/>
-                        <a:ea typeface="Calibri" panose="020F0502020204030204" pitchFamily="34" charset="0"/>
-                        <a:cs typeface="Arial" panose="020B0604020202020204" pitchFamily="34" charset="0"/>
-                      </a:endParaRPr>
-                    </a:p>
-                  </a:txBody>
-                  <a:tcPr marL="0" marR="0" marT="0" marB="0" anchor="ctr">
-                    <a:lnL w="12700" cap="flat" cmpd="sng" algn="ctr">
-                      <a:solidFill>
-                        <a:schemeClr val="tx1"/>
-                      </a:solidFill>
-                      <a:prstDash val="solid"/>
-                      <a:round/>
-                      <a:headEnd type="none" w="med" len="med"/>
-                      <a:tailEnd type="none" w="med" len="med"/>
-                    </a:lnL>
-                    <a:lnR w="12700" cap="flat" cmpd="sng" algn="ctr">
-                      <a:solidFill>
-                        <a:schemeClr val="tx1"/>
-                      </a:solidFill>
-                      <a:prstDash val="solid"/>
-                      <a:round/>
-                      <a:headEnd type="none" w="med" len="med"/>
-                      <a:tailEnd type="none" w="med" len="med"/>
-                    </a:lnR>
-                    <a:lnT w="12700" cap="flat" cmpd="sng" algn="ctr">
-                      <a:solidFill>
-                        <a:schemeClr val="tx1"/>
-                      </a:solidFill>
-                      <a:prstDash val="solid"/>
-                      <a:round/>
-                      <a:headEnd type="none" w="med" len="med"/>
-                      <a:tailEnd type="none" w="med" len="med"/>
-                    </a:lnT>
-                    <a:lnB w="12700" cap="flat" cmpd="sng" algn="ctr">
-                      <a:solidFill>
-                        <a:schemeClr val="tx1"/>
-                      </a:solidFill>
-                      <a:prstDash val="solid"/>
-                      <a:round/>
-                      <a:headEnd type="none" w="med" len="med"/>
-                      <a:tailEnd type="none" w="med" len="med"/>
-                    </a:lnB>
-                    <a:noFill/>
-                  </a:tcPr>
-                </a:tc>
-                <a:tc>
-                  <a:txBody>
-                    <a:bodyPr/>
-                    <a:lstStyle/>
-                    <a:p>
-                      <a:pPr marL="5080" algn="ctr">
-                        <a:lnSpc>
-                          <a:spcPts val="1800"/>
-                        </a:lnSpc>
-                      </a:pPr>
-                      <a:r>
-                        <a:rPr lang="es-MX" sz="1400" b="0" dirty="0">
-                          <a:solidFill>
-                            <a:schemeClr val="tx1"/>
-                          </a:solidFill>
-                          <a:effectLst/>
-                          <a:latin typeface="Arial" panose="020B0604020202020204" pitchFamily="34" charset="0"/>
-                          <a:ea typeface="Calibri" panose="020F0502020204030204" pitchFamily="34" charset="0"/>
-                          <a:cs typeface="Arial" panose="020B0604020202020204" pitchFamily="34" charset="0"/>
-                        </a:rPr>
-                        <a:t>10</a:t>
-                      </a:r>
                     </a:p>
                   </a:txBody>
                   <a:tcPr marL="0" marR="0" marT="0" marB="0" anchor="ctr">
@@ -8870,6 +8786,67 @@
                     <a:bodyPr/>
                     <a:lstStyle/>
                     <a:p>
+                      <a:pPr marL="5080" algn="ctr">
+                        <a:lnSpc>
+                          <a:spcPts val="1800"/>
+                        </a:lnSpc>
+                      </a:pPr>
+                      <a:endParaRPr lang="es-MX" sz="1400" b="0" dirty="0">
+                        <a:solidFill>
+                          <a:schemeClr val="tx1"/>
+                        </a:solidFill>
+                        <a:effectLst/>
+                        <a:latin typeface="Arial" panose="020B0604020202020204" pitchFamily="34" charset="0"/>
+                        <a:ea typeface="Calibri" panose="020F0502020204030204" pitchFamily="34" charset="0"/>
+                        <a:cs typeface="Arial" panose="020B0604020202020204" pitchFamily="34" charset="0"/>
+                      </a:endParaRPr>
+                    </a:p>
+                  </a:txBody>
+                  <a:tcPr marL="0" marR="0" marT="0" marB="0" anchor="ctr">
+                    <a:lnL w="12700" cap="flat" cmpd="sng" algn="ctr">
+                      <a:solidFill>
+                        <a:schemeClr val="tx1"/>
+                      </a:solidFill>
+                      <a:prstDash val="solid"/>
+                      <a:round/>
+                      <a:headEnd type="none" w="med" len="med"/>
+                      <a:tailEnd type="none" w="med" len="med"/>
+                    </a:lnL>
+                    <a:lnR w="12700" cap="flat" cmpd="sng" algn="ctr">
+                      <a:solidFill>
+                        <a:schemeClr val="tx1"/>
+                      </a:solidFill>
+                      <a:prstDash val="solid"/>
+                      <a:round/>
+                      <a:headEnd type="none" w="med" len="med"/>
+                      <a:tailEnd type="none" w="med" len="med"/>
+                    </a:lnR>
+                    <a:lnT w="12700" cap="flat" cmpd="sng" algn="ctr">
+                      <a:solidFill>
+                        <a:schemeClr val="tx1"/>
+                      </a:solidFill>
+                      <a:prstDash val="solid"/>
+                      <a:round/>
+                      <a:headEnd type="none" w="med" len="med"/>
+                      <a:tailEnd type="none" w="med" len="med"/>
+                    </a:lnT>
+                    <a:lnB w="12700" cap="flat" cmpd="sng" algn="ctr">
+                      <a:solidFill>
+                        <a:schemeClr val="tx1"/>
+                      </a:solidFill>
+                      <a:prstDash val="solid"/>
+                      <a:round/>
+                      <a:headEnd type="none" w="med" len="med"/>
+                      <a:tailEnd type="none" w="med" len="med"/>
+                    </a:lnB>
+                    <a:noFill/>
+                  </a:tcPr>
+                </a:tc>
+                <a:tc>
+                  <a:txBody>
+                    <a:bodyPr/>
+                    <a:lstStyle/>
+                    <a:p>
                       <a:pPr marL="3810" algn="ctr">
                         <a:lnSpc>
                           <a:spcPts val="1800"/>
@@ -8931,7 +8908,80 @@
                     <a:bodyPr/>
                     <a:lstStyle/>
                     <a:p>
-                      <a:pPr marL="5080" algn="ctr">
+                      <a:pPr marL="3810" marR="0" lvl="0" indent="0" algn="ctr" defTabSz="914400" eaLnBrk="1" fontAlgn="auto" latinLnBrk="0" hangingPunct="1">
+                        <a:lnSpc>
+                          <a:spcPts val="1800"/>
+                        </a:lnSpc>
+                        <a:spcBef>
+                          <a:spcPts val="0"/>
+                        </a:spcBef>
+                        <a:spcAft>
+                          <a:spcPts val="0"/>
+                        </a:spcAft>
+                        <a:buClrTx/>
+                        <a:buSzTx/>
+                        <a:buFontTx/>
+                        <a:buNone/>
+                        <a:tabLst/>
+                        <a:defRPr/>
+                      </a:pPr>
+                      <a:endParaRPr lang="es-MX" sz="1400" b="0" dirty="0">
+                        <a:solidFill>
+                          <a:schemeClr val="tx1"/>
+                        </a:solidFill>
+                        <a:effectLst/>
+                        <a:latin typeface="Arial" panose="020B0604020202020204" pitchFamily="34" charset="0"/>
+                        <a:ea typeface="Calibri" panose="020F0502020204030204" pitchFamily="34" charset="0"/>
+                        <a:cs typeface="Arial" panose="020B0604020202020204" pitchFamily="34" charset="0"/>
+                      </a:endParaRPr>
+                    </a:p>
+                  </a:txBody>
+                  <a:tcPr marL="0" marR="0" marT="0" marB="0" anchor="ctr">
+                    <a:lnL w="12700" cap="flat" cmpd="sng" algn="ctr">
+                      <a:solidFill>
+                        <a:schemeClr val="tx1"/>
+                      </a:solidFill>
+                      <a:prstDash val="solid"/>
+                      <a:round/>
+                      <a:headEnd type="none" w="med" len="med"/>
+                      <a:tailEnd type="none" w="med" len="med"/>
+                    </a:lnL>
+                    <a:lnR w="12700" cap="flat" cmpd="sng" algn="ctr">
+                      <a:solidFill>
+                        <a:schemeClr val="tx1"/>
+                      </a:solidFill>
+                      <a:prstDash val="solid"/>
+                      <a:round/>
+                      <a:headEnd type="none" w="med" len="med"/>
+                      <a:tailEnd type="none" w="med" len="med"/>
+                    </a:lnR>
+                    <a:lnT w="12700" cap="flat" cmpd="sng" algn="ctr">
+                      <a:solidFill>
+                        <a:schemeClr val="tx1"/>
+                      </a:solidFill>
+                      <a:prstDash val="solid"/>
+                      <a:round/>
+                      <a:headEnd type="none" w="med" len="med"/>
+                      <a:tailEnd type="none" w="med" len="med"/>
+                    </a:lnT>
+                    <a:lnB w="12700" cap="flat" cmpd="sng" algn="ctr">
+                      <a:solidFill>
+                        <a:schemeClr val="tx1"/>
+                      </a:solidFill>
+                      <a:prstDash val="solid"/>
+                      <a:round/>
+                      <a:headEnd type="none" w="med" len="med"/>
+                      <a:tailEnd type="none" w="med" len="med"/>
+                    </a:lnB>
+                    <a:noFill/>
+                  </a:tcPr>
+                </a:tc>
+                <a:tc>
+                  <a:txBody>
+                    <a:bodyPr/>
+                    <a:lstStyle/>
+                    <a:p>
+                      <a:pPr marL="3810" algn="ctr">
                         <a:lnSpc>
                           <a:spcPts val="1800"/>
                         </a:lnSpc>
@@ -8941,6 +8991,9 @@
                           <a:schemeClr val="tx1"/>
                         </a:solidFill>
                         <a:effectLst/>
+                        <a:highlight>
+                          <a:srgbClr val="FFFF00"/>
+                        </a:highlight>
                         <a:latin typeface="Arial" panose="020B0604020202020204" pitchFamily="34" charset="0"/>
                         <a:ea typeface="Calibri" panose="020F0502020204030204" pitchFamily="34" charset="0"/>
                         <a:cs typeface="Arial" panose="020B0604020202020204" pitchFamily="34" charset="0"/>
@@ -9138,17 +9191,6 @@
                           <a:spcPts val="1800"/>
                         </a:lnSpc>
                       </a:pPr>
-                      <a:r>
-                        <a:rPr lang="es-MX" sz="1400" b="0" spc="-5" dirty="0">
-                          <a:solidFill>
-                            <a:schemeClr val="tx1"/>
-                          </a:solidFill>
-                          <a:effectLst/>
-                          <a:latin typeface="Arial" panose="020B0604020202020204" pitchFamily="34" charset="0"/>
-                          <a:cs typeface="Arial" panose="020B0604020202020204" pitchFamily="34" charset="0"/>
-                        </a:rPr>
-                        <a:t>20</a:t>
-                      </a:r>
                       <a:endParaRPr lang="es-MX" sz="1400" b="0" dirty="0">
                         <a:solidFill>
                           <a:schemeClr val="tx1"/>
@@ -9210,18 +9252,15 @@
                           <a:spcPts val="1800"/>
                         </a:lnSpc>
                       </a:pPr>
-                      <a:r>
-                        <a:rPr lang="es-MX" sz="1400" b="0" dirty="0">
-                          <a:solidFill>
-                            <a:schemeClr val="tx1"/>
-                          </a:solidFill>
-                          <a:effectLst/>
-                          <a:latin typeface="Arial" panose="020B0604020202020204" pitchFamily="34" charset="0"/>
-                          <a:ea typeface="Calibri" panose="020F0502020204030204" pitchFamily="34" charset="0"/>
-                          <a:cs typeface="Arial" panose="020B0604020202020204" pitchFamily="34" charset="0"/>
-                        </a:rPr>
-                        <a:t>120</a:t>
-                      </a:r>
+                      <a:endParaRPr lang="es-MX" sz="1400" b="0" dirty="0">
+                        <a:solidFill>
+                          <a:schemeClr val="tx1"/>
+                        </a:solidFill>
+                        <a:effectLst/>
+                        <a:latin typeface="Arial" panose="020B0604020202020204" pitchFamily="34" charset="0"/>
+                        <a:ea typeface="Calibri" panose="020F0502020204030204" pitchFamily="34" charset="0"/>
+                        <a:cs typeface="Arial" panose="020B0604020202020204" pitchFamily="34" charset="0"/>
+                      </a:endParaRPr>
                     </a:p>
                   </a:txBody>
                   <a:tcPr marL="0" marR="0" marT="0" marB="0" anchor="ctr">
@@ -9340,6 +9379,9 @@
                           <a:schemeClr val="tx1"/>
                         </a:solidFill>
                         <a:effectLst/>
+                        <a:highlight>
+                          <a:srgbClr val="FFFF00"/>
+                        </a:highlight>
                         <a:latin typeface="Arial" panose="020B0604020202020204" pitchFamily="34" charset="0"/>
                         <a:ea typeface="Calibri" panose="020F0502020204030204" pitchFamily="34" charset="0"/>
                         <a:cs typeface="Arial" panose="020B0604020202020204" pitchFamily="34" charset="0"/>
@@ -9391,7 +9433,7 @@
                     <a:bodyPr/>
                     <a:lstStyle/>
                     <a:p>
-                      <a:pPr marL="5080" algn="ctr">
+                      <a:pPr marL="3810" algn="ctr">
                         <a:lnSpc>
                           <a:spcPts val="1800"/>
                         </a:lnSpc>
@@ -9401,6 +9443,9 @@
                           <a:schemeClr val="tx1"/>
                         </a:solidFill>
                         <a:effectLst/>
+                        <a:highlight>
+                          <a:srgbClr val="FFFF00"/>
+                        </a:highlight>
                         <a:latin typeface="Arial" panose="020B0604020202020204" pitchFamily="34" charset="0"/>
                         <a:ea typeface="Calibri" panose="020F0502020204030204" pitchFamily="34" charset="0"/>
                         <a:cs typeface="Arial" panose="020B0604020202020204" pitchFamily="34" charset="0"/>
@@ -9597,17 +9642,6 @@
                           <a:spcPts val="1800"/>
                         </a:lnSpc>
                       </a:pPr>
-                      <a:r>
-                        <a:rPr lang="es-MX" sz="1400" b="0" spc="-5" dirty="0">
-                          <a:solidFill>
-                            <a:schemeClr val="tx1"/>
-                          </a:solidFill>
-                          <a:effectLst/>
-                          <a:latin typeface="Arial" panose="020B0604020202020204" pitchFamily="34" charset="0"/>
-                          <a:cs typeface="Arial" panose="020B0604020202020204" pitchFamily="34" charset="0"/>
-                        </a:rPr>
-                        <a:t>30</a:t>
-                      </a:r>
                       <a:endParaRPr lang="es-MX" sz="1400" b="0" dirty="0">
                         <a:solidFill>
                           <a:schemeClr val="tx1"/>
@@ -9669,18 +9703,15 @@
                           <a:spcPts val="1800"/>
                         </a:lnSpc>
                       </a:pPr>
-                      <a:r>
-                        <a:rPr lang="es-MX" sz="1400" b="0" dirty="0">
-                          <a:solidFill>
-                            <a:schemeClr val="tx1"/>
-                          </a:solidFill>
-                          <a:effectLst/>
-                          <a:latin typeface="Arial" panose="020B0604020202020204" pitchFamily="34" charset="0"/>
-                          <a:ea typeface="Calibri" panose="020F0502020204030204" pitchFamily="34" charset="0"/>
-                          <a:cs typeface="Arial" panose="020B0604020202020204" pitchFamily="34" charset="0"/>
-                        </a:rPr>
-                        <a:t>5</a:t>
-                      </a:r>
+                      <a:endParaRPr lang="es-MX" sz="1400" b="0" dirty="0">
+                        <a:solidFill>
+                          <a:schemeClr val="tx1"/>
+                        </a:solidFill>
+                        <a:effectLst/>
+                        <a:latin typeface="Arial" panose="020B0604020202020204" pitchFamily="34" charset="0"/>
+                        <a:ea typeface="Calibri" panose="020F0502020204030204" pitchFamily="34" charset="0"/>
+                        <a:cs typeface="Arial" panose="020B0604020202020204" pitchFamily="34" charset="0"/>
+                      </a:endParaRPr>
                     </a:p>
                   </a:txBody>
                   <a:tcPr marL="0" marR="0" marT="0" marB="0" anchor="ctr">
@@ -9850,7 +9881,7 @@
                     <a:bodyPr/>
                     <a:lstStyle/>
                     <a:p>
-                      <a:pPr marL="5080" algn="ctr">
+                      <a:pPr marL="3810" algn="ctr">
                         <a:lnSpc>
                           <a:spcPts val="1800"/>
                         </a:lnSpc>
@@ -9860,6 +9891,9 @@
                           <a:schemeClr val="tx1"/>
                         </a:solidFill>
                         <a:effectLst/>
+                        <a:highlight>
+                          <a:srgbClr val="FFFF00"/>
+                        </a:highlight>
                         <a:latin typeface="Arial" panose="020B0604020202020204" pitchFamily="34" charset="0"/>
                         <a:ea typeface="Calibri" panose="020F0502020204030204" pitchFamily="34" charset="0"/>
                         <a:cs typeface="Arial" panose="020B0604020202020204" pitchFamily="34" charset="0"/>
@@ -10048,18 +10082,15 @@
                           <a:spcPts val="1800"/>
                         </a:lnSpc>
                       </a:pPr>
-                      <a:r>
-                        <a:rPr lang="es-MX" sz="1400" b="0" dirty="0">
-                          <a:solidFill>
-                            <a:schemeClr val="tx1"/>
-                          </a:solidFill>
-                          <a:effectLst/>
-                          <a:latin typeface="Arial" panose="020B0604020202020204" pitchFamily="34" charset="0"/>
-                          <a:ea typeface="Calibri" panose="020F0502020204030204" pitchFamily="34" charset="0"/>
-                          <a:cs typeface="Arial" panose="020B0604020202020204" pitchFamily="34" charset="0"/>
-                        </a:rPr>
-                        <a:t>1</a:t>
-                      </a:r>
+                      <a:endParaRPr lang="es-MX" sz="1400" b="0" dirty="0">
+                        <a:solidFill>
+                          <a:schemeClr val="tx1"/>
+                        </a:solidFill>
+                        <a:effectLst/>
+                        <a:latin typeface="Arial" panose="020B0604020202020204" pitchFamily="34" charset="0"/>
+                        <a:ea typeface="Calibri" panose="020F0502020204030204" pitchFamily="34" charset="0"/>
+                        <a:cs typeface="Arial" panose="020B0604020202020204" pitchFamily="34" charset="0"/>
+                      </a:endParaRPr>
                     </a:p>
                   </a:txBody>
                   <a:tcPr marL="0" marR="0" marT="0" marB="0" anchor="ctr">
@@ -10112,18 +10143,15 @@
                           <a:spcPts val="1800"/>
                         </a:lnSpc>
                       </a:pPr>
-                      <a:r>
-                        <a:rPr lang="es-MX" sz="1400" b="0" dirty="0">
-                          <a:solidFill>
-                            <a:schemeClr val="tx1"/>
-                          </a:solidFill>
-                          <a:effectLst/>
-                          <a:latin typeface="Arial" panose="020B0604020202020204" pitchFamily="34" charset="0"/>
-                          <a:ea typeface="Calibri" panose="020F0502020204030204" pitchFamily="34" charset="0"/>
-                          <a:cs typeface="Arial" panose="020B0604020202020204" pitchFamily="34" charset="0"/>
-                        </a:rPr>
-                        <a:t>4</a:t>
-                      </a:r>
+                      <a:endParaRPr lang="es-MX" sz="1400" b="0" dirty="0">
+                        <a:solidFill>
+                          <a:schemeClr val="tx1"/>
+                        </a:solidFill>
+                        <a:effectLst/>
+                        <a:latin typeface="Arial" panose="020B0604020202020204" pitchFamily="34" charset="0"/>
+                        <a:ea typeface="Calibri" panose="020F0502020204030204" pitchFamily="34" charset="0"/>
+                        <a:cs typeface="Arial" panose="020B0604020202020204" pitchFamily="34" charset="0"/>
+                      </a:endParaRPr>
                     </a:p>
                   </a:txBody>
                   <a:tcPr marL="0" marR="0" marT="0" marB="0" anchor="ctr">
@@ -10378,10 +10406,22 @@
                     <a:bodyPr/>
                     <a:lstStyle/>
                     <a:p>
-                      <a:pPr marL="5080" algn="ctr">
+                      <a:pPr marL="5080" marR="0" lvl="0" indent="0" algn="ctr" defTabSz="914400" eaLnBrk="1" fontAlgn="auto" latinLnBrk="0" hangingPunct="1">
                         <a:lnSpc>
                           <a:spcPts val="1800"/>
                         </a:lnSpc>
+                        <a:spcBef>
+                          <a:spcPts val="0"/>
+                        </a:spcBef>
+                        <a:spcAft>
+                          <a:spcPts val="0"/>
+                        </a:spcAft>
+                        <a:buClrTx/>
+                        <a:buSzTx/>
+                        <a:buFontTx/>
+                        <a:buNone/>
+                        <a:tabLst/>
+                        <a:defRPr/>
                       </a:pPr>
                       <a:endParaRPr lang="es-MX" sz="1400" b="0" dirty="0">
                         <a:solidFill>
@@ -11699,7 +11739,7 @@
                   <a:schemeClr val="tx1"/>
                 </a:solidFill>
               </a:rPr>
-              <a:t>VLAN 10: Manager</a:t>
+              <a:t>VLAN 10: Managers</a:t>
             </a:r>
           </a:p>
           <a:p>
@@ -12958,7 +12998,7 @@
           <p:nvPr>
             <p:extLst>
               <p:ext uri="{D42A27DB-BD31-4B8C-83A1-F6EECF244321}">
-                <p14:modId xmlns:p14="http://schemas.microsoft.com/office/powerpoint/2010/main" val="4260595657"/>
+                <p14:modId xmlns:p14="http://schemas.microsoft.com/office/powerpoint/2010/main" val="2314396203"/>
               </p:ext>
             </p:extLst>
           </p:nvPr>
@@ -13405,7 +13445,7 @@
                           <a:latin typeface="Arial" panose="020B0604020202020204" pitchFamily="34" charset="0"/>
                           <a:cs typeface="Arial" panose="020B0604020202020204" pitchFamily="34" charset="0"/>
                         </a:rPr>
-                        <a:t>Management</a:t>
+                        <a:t>Managers</a:t>
                       </a:r>
                       <a:endParaRPr lang="es-MX" sz="1400" b="1" dirty="0">
                         <a:solidFill>

--- a/Calendario2026/Ejercicios/E2_VLAN/Ejer2_VLANs.pptx
+++ b/Calendario2026/Ejercicios/E2_VLAN/Ejer2_VLANs.pptx
@@ -141,7 +141,7 @@
 <file path=ppt/revisionInfo.xml><?xml version="1.0" encoding="utf-8"?>
 <p1510:revInfo xmlns:a="http://schemas.openxmlformats.org/drawingml/2006/main" xmlns:r="http://schemas.openxmlformats.org/officeDocument/2006/relationships" xmlns:p1510="http://schemas.microsoft.com/office/powerpoint/2015/10/main">
   <p1510:revLst>
-    <p1510:client id="{37B6C174-159D-4F38-87E0-B71FD639C87F}" v="7" dt="2026-03-24T18:10:32.428"/>
+    <p1510:client id="{37B6C174-159D-4F38-87E0-B71FD639C87F}" v="8" dt="2026-03-25T14:36:44.247"/>
   </p1510:revLst>
 </p1510:revInfo>
 </file>
@@ -151,7 +151,7 @@
   <pc:docChgLst>
     <pc:chgData name="Lizethe Pérez Fuertes" userId="4ae9ef87-2a7d-42f8-8dfa-0a501a9e2ff4" providerId="ADAL" clId="{FDDD45CB-1330-4033-A842-3D2746AFF7C7}"/>
     <pc:docChg chg="custSel modSld">
-      <pc:chgData name="Lizethe Pérez Fuertes" userId="4ae9ef87-2a7d-42f8-8dfa-0a501a9e2ff4" providerId="ADAL" clId="{FDDD45CB-1330-4033-A842-3D2746AFF7C7}" dt="2026-03-24T22:22:29.149" v="284" actId="6549"/>
+      <pc:chgData name="Lizethe Pérez Fuertes" userId="4ae9ef87-2a7d-42f8-8dfa-0a501a9e2ff4" providerId="ADAL" clId="{FDDD45CB-1330-4033-A842-3D2746AFF7C7}" dt="2026-03-25T14:36:47.384" v="286" actId="6549"/>
       <pc:docMkLst>
         <pc:docMk/>
       </pc:docMkLst>
@@ -201,13 +201,13 @@
         </pc:graphicFrameChg>
       </pc:sldChg>
       <pc:sldChg chg="modSp mod">
-        <pc:chgData name="Lizethe Pérez Fuertes" userId="4ae9ef87-2a7d-42f8-8dfa-0a501a9e2ff4" providerId="ADAL" clId="{FDDD45CB-1330-4033-A842-3D2746AFF7C7}" dt="2026-03-24T22:22:29.149" v="284" actId="6549"/>
+        <pc:chgData name="Lizethe Pérez Fuertes" userId="4ae9ef87-2a7d-42f8-8dfa-0a501a9e2ff4" providerId="ADAL" clId="{FDDD45CB-1330-4033-A842-3D2746AFF7C7}" dt="2026-03-25T14:36:47.384" v="286" actId="6549"/>
         <pc:sldMkLst>
           <pc:docMk/>
           <pc:sldMk cId="1392632694" sldId="360"/>
         </pc:sldMkLst>
         <pc:graphicFrameChg chg="mod modGraphic">
-          <ac:chgData name="Lizethe Pérez Fuertes" userId="4ae9ef87-2a7d-42f8-8dfa-0a501a9e2ff4" providerId="ADAL" clId="{FDDD45CB-1330-4033-A842-3D2746AFF7C7}" dt="2026-03-24T22:22:29.149" v="284" actId="6549"/>
+          <ac:chgData name="Lizethe Pérez Fuertes" userId="4ae9ef87-2a7d-42f8-8dfa-0a501a9e2ff4" providerId="ADAL" clId="{FDDD45CB-1330-4033-A842-3D2746AFF7C7}" dt="2026-03-25T14:36:47.384" v="286" actId="6549"/>
           <ac:graphicFrameMkLst>
             <pc:docMk/>
             <pc:sldMk cId="1392632694" sldId="360"/>
@@ -1269,7 +1269,7 @@
           <a:p>
             <a:fld id="{1D8BD707-D9CF-40AE-B4C6-C98DA3205C09}" type="datetimeFigureOut">
               <a:rPr lang="en-US"/>
-              <a:t>3/24/2026</a:t>
+              <a:t>3/25/2026</a:t>
             </a:fld>
             <a:endParaRPr lang="en-US" dirty="0"/>
           </a:p>
@@ -1446,7 +1446,7 @@
           <a:p>
             <a:fld id="{1D8BD707-D9CF-40AE-B4C6-C98DA3205C09}" type="datetimeFigureOut">
               <a:rPr lang="en-US"/>
-              <a:t>3/24/2026</a:t>
+              <a:t>3/25/2026</a:t>
             </a:fld>
             <a:endParaRPr lang="en-US" dirty="0"/>
           </a:p>
@@ -1660,7 +1660,7 @@
           <a:p>
             <a:fld id="{1D8BD707-D9CF-40AE-B4C6-C98DA3205C09}" type="datetimeFigureOut">
               <a:rPr lang="en-US"/>
-              <a:t>3/24/2026</a:t>
+              <a:t>3/25/2026</a:t>
             </a:fld>
             <a:endParaRPr lang="en-US" dirty="0"/>
           </a:p>
@@ -1808,7 +1808,7 @@
           <a:p>
             <a:fld id="{1D8BD707-D9CF-40AE-B4C6-C98DA3205C09}" type="datetimeFigureOut">
               <a:rPr lang="en-US"/>
-              <a:t>3/24/2026</a:t>
+              <a:t>3/25/2026</a:t>
             </a:fld>
             <a:endParaRPr lang="en-US" dirty="0"/>
           </a:p>
@@ -1964,7 +1964,7 @@
           <a:p>
             <a:fld id="{1D8BD707-D9CF-40AE-B4C6-C98DA3205C09}" type="datetimeFigureOut">
               <a:rPr lang="en-US"/>
-              <a:t>3/24/2026</a:t>
+              <a:t>3/25/2026</a:t>
             </a:fld>
             <a:endParaRPr lang="en-US" dirty="0"/>
           </a:p>
@@ -2049,7 +2049,7 @@
           <a:p>
             <a:fld id="{5E75A0DC-66C6-4CEC-A5EB-F8C97CEC3796}" type="datetimeFigureOut">
               <a:rPr lang="es-MX" smtClean="0"/>
-              <a:t>24/03/2026</a:t>
+              <a:t>25/03/2026</a:t>
             </a:fld>
             <a:endParaRPr lang="es-MX" dirty="0"/>
           </a:p>
@@ -2306,7 +2306,7 @@
           <a:p>
             <a:fld id="{5E75A0DC-66C6-4CEC-A5EB-F8C97CEC3796}" type="datetimeFigureOut">
               <a:rPr lang="es-MX" smtClean="0"/>
-              <a:t>24/03/2026</a:t>
+              <a:t>25/03/2026</a:t>
             </a:fld>
             <a:endParaRPr lang="es-MX" dirty="0"/>
           </a:p>
@@ -2556,7 +2556,7 @@
           <a:p>
             <a:fld id="{1D8BD707-D9CF-40AE-B4C6-C98DA3205C09}" type="datetimeFigureOut">
               <a:rPr lang="en-US"/>
-              <a:t>3/24/2026</a:t>
+              <a:t>3/25/2026</a:t>
             </a:fld>
             <a:endParaRPr lang="en-US" dirty="0"/>
           </a:p>
@@ -8094,7 +8094,7 @@
           <p:nvPr>
             <p:extLst>
               <p:ext uri="{D42A27DB-BD31-4B8C-83A1-F6EECF244321}">
-                <p14:modId xmlns:p14="http://schemas.microsoft.com/office/powerpoint/2010/main" val="63459820"/>
+                <p14:modId xmlns:p14="http://schemas.microsoft.com/office/powerpoint/2010/main" val="950701987"/>
               </p:ext>
             </p:extLst>
           </p:nvPr>
@@ -8725,23 +8725,30 @@
                     <a:bodyPr/>
                     <a:lstStyle/>
                     <a:p>
-                      <a:pPr marL="3810" algn="ctr">
-                        <a:lnSpc>
-                          <a:spcPts val="1800"/>
-                        </a:lnSpc>
+                      <a:pPr algn="ctr">
+                        <a:buNone/>
                       </a:pPr>
-                      <a:endParaRPr lang="es-MX" sz="1400" b="0" dirty="0">
-                        <a:solidFill>
-                          <a:schemeClr val="tx1"/>
-                        </a:solidFill>
+                      <a:r>
+                        <a:rPr lang="es-MX" sz="1100" b="1" spc="-5">
+                          <a:solidFill>
+                            <a:srgbClr val="2C3A45"/>
+                          </a:solidFill>
+                          <a:effectLst/>
+                          <a:latin typeface="Arial" panose="020B0604020202020204" pitchFamily="34" charset="0"/>
+                          <a:ea typeface="Calibri" panose="020F0502020204030204" pitchFamily="34" charset="0"/>
+                          <a:cs typeface="Times New Roman" panose="02020603050405020304" pitchFamily="18" charset="0"/>
+                        </a:rPr>
+                        <a:t>10</a:t>
+                      </a:r>
+                      <a:endParaRPr lang="es-MX" sz="1100">
                         <a:effectLst/>
-                        <a:latin typeface="Arial" panose="020B0604020202020204" pitchFamily="34" charset="0"/>
+                        <a:latin typeface="Calibri" panose="020F0502020204030204" pitchFamily="34" charset="0"/>
                         <a:ea typeface="Calibri" panose="020F0502020204030204" pitchFamily="34" charset="0"/>
-                        <a:cs typeface="Arial" panose="020B0604020202020204" pitchFamily="34" charset="0"/>
+                        <a:cs typeface="Times New Roman" panose="02020603050405020304" pitchFamily="18" charset="0"/>
                       </a:endParaRPr>
                     </a:p>
                   </a:txBody>
-                  <a:tcPr marL="0" marR="0" marT="0" marB="0" anchor="ctr">
+                  <a:tcPr marL="9525" marR="9525" marT="9525" marB="0" anchor="ctr">
                     <a:lnL w="12700" cap="flat" cmpd="sng" algn="ctr">
                       <a:solidFill>
                         <a:schemeClr val="tx1"/>
@@ -8786,23 +8793,30 @@
                     <a:bodyPr/>
                     <a:lstStyle/>
                     <a:p>
-                      <a:pPr marL="5080" algn="ctr">
-                        <a:lnSpc>
-                          <a:spcPts val="1800"/>
-                        </a:lnSpc>
+                      <a:pPr algn="ctr">
+                        <a:buNone/>
                       </a:pPr>
-                      <a:endParaRPr lang="es-MX" sz="1400" b="0" dirty="0">
-                        <a:solidFill>
-                          <a:schemeClr val="tx1"/>
-                        </a:solidFill>
+                      <a:r>
+                        <a:rPr lang="es-MX" sz="1100" b="1" spc="-5">
+                          <a:solidFill>
+                            <a:srgbClr val="2C3A45"/>
+                          </a:solidFill>
+                          <a:effectLst/>
+                          <a:latin typeface="Arial" panose="020B0604020202020204" pitchFamily="34" charset="0"/>
+                          <a:ea typeface="Calibri" panose="020F0502020204030204" pitchFamily="34" charset="0"/>
+                          <a:cs typeface="Times New Roman" panose="02020603050405020304" pitchFamily="18" charset="0"/>
+                        </a:rPr>
+                        <a:t>10</a:t>
+                      </a:r>
+                      <a:endParaRPr lang="es-MX" sz="1100">
                         <a:effectLst/>
-                        <a:latin typeface="Arial" panose="020B0604020202020204" pitchFamily="34" charset="0"/>
+                        <a:latin typeface="Calibri" panose="020F0502020204030204" pitchFamily="34" charset="0"/>
                         <a:ea typeface="Calibri" panose="020F0502020204030204" pitchFamily="34" charset="0"/>
-                        <a:cs typeface="Arial" panose="020B0604020202020204" pitchFamily="34" charset="0"/>
+                        <a:cs typeface="Times New Roman" panose="02020603050405020304" pitchFamily="18" charset="0"/>
                       </a:endParaRPr>
                     </a:p>
                   </a:txBody>
-                  <a:tcPr marL="0" marR="0" marT="0" marB="0" anchor="ctr">
+                  <a:tcPr marL="9525" marR="9525" marT="9525" marB="0" anchor="ctr">
                     <a:lnL w="12700" cap="flat" cmpd="sng" algn="ctr">
                       <a:solidFill>
                         <a:schemeClr val="tx1"/>
@@ -9186,23 +9200,30 @@
                     <a:bodyPr/>
                     <a:lstStyle/>
                     <a:p>
-                      <a:pPr marL="3810" algn="ctr">
-                        <a:lnSpc>
-                          <a:spcPts val="1800"/>
-                        </a:lnSpc>
+                      <a:pPr algn="ctr">
+                        <a:buNone/>
                       </a:pPr>
-                      <a:endParaRPr lang="es-MX" sz="1400" b="0" dirty="0">
-                        <a:solidFill>
-                          <a:schemeClr val="tx1"/>
-                        </a:solidFill>
+                      <a:r>
+                        <a:rPr lang="es-MX" sz="1100" b="1" spc="-5">
+                          <a:solidFill>
+                            <a:srgbClr val="2C3A45"/>
+                          </a:solidFill>
+                          <a:effectLst/>
+                          <a:latin typeface="Arial" panose="020B0604020202020204" pitchFamily="34" charset="0"/>
+                          <a:ea typeface="Calibri" panose="020F0502020204030204" pitchFamily="34" charset="0"/>
+                          <a:cs typeface="Times New Roman" panose="02020603050405020304" pitchFamily="18" charset="0"/>
+                        </a:rPr>
+                        <a:t>20</a:t>
+                      </a:r>
+                      <a:endParaRPr lang="es-MX" sz="1100">
                         <a:effectLst/>
-                        <a:latin typeface="Arial" panose="020B0604020202020204" pitchFamily="34" charset="0"/>
+                        <a:latin typeface="Calibri" panose="020F0502020204030204" pitchFamily="34" charset="0"/>
                         <a:ea typeface="Calibri" panose="020F0502020204030204" pitchFamily="34" charset="0"/>
-                        <a:cs typeface="Arial" panose="020B0604020202020204" pitchFamily="34" charset="0"/>
+                        <a:cs typeface="Times New Roman" panose="02020603050405020304" pitchFamily="18" charset="0"/>
                       </a:endParaRPr>
                     </a:p>
                   </a:txBody>
-                  <a:tcPr marL="0" marR="0" marT="0" marB="0" anchor="ctr">
+                  <a:tcPr marL="9525" marR="9525" marT="9525" marB="0" anchor="ctr">
                     <a:lnL w="12700" cap="flat" cmpd="sng" algn="ctr">
                       <a:solidFill>
                         <a:schemeClr val="tx1"/>
@@ -9247,23 +9268,30 @@
                     <a:bodyPr/>
                     <a:lstStyle/>
                     <a:p>
-                      <a:pPr marL="5080" algn="ctr">
-                        <a:lnSpc>
-                          <a:spcPts val="1800"/>
-                        </a:lnSpc>
+                      <a:pPr algn="ctr">
+                        <a:buNone/>
                       </a:pPr>
-                      <a:endParaRPr lang="es-MX" sz="1400" b="0" dirty="0">
-                        <a:solidFill>
-                          <a:schemeClr val="tx1"/>
-                        </a:solidFill>
+                      <a:r>
+                        <a:rPr lang="es-MX" sz="1100" b="1" spc="-5">
+                          <a:solidFill>
+                            <a:srgbClr val="2C3A45"/>
+                          </a:solidFill>
+                          <a:effectLst/>
+                          <a:latin typeface="Arial" panose="020B0604020202020204" pitchFamily="34" charset="0"/>
+                          <a:ea typeface="Calibri" panose="020F0502020204030204" pitchFamily="34" charset="0"/>
+                          <a:cs typeface="Times New Roman" panose="02020603050405020304" pitchFamily="18" charset="0"/>
+                        </a:rPr>
+                        <a:t>120</a:t>
+                      </a:r>
+                      <a:endParaRPr lang="es-MX" sz="1100">
                         <a:effectLst/>
-                        <a:latin typeface="Arial" panose="020B0604020202020204" pitchFamily="34" charset="0"/>
+                        <a:latin typeface="Calibri" panose="020F0502020204030204" pitchFamily="34" charset="0"/>
                         <a:ea typeface="Calibri" panose="020F0502020204030204" pitchFamily="34" charset="0"/>
-                        <a:cs typeface="Arial" panose="020B0604020202020204" pitchFamily="34" charset="0"/>
+                        <a:cs typeface="Times New Roman" panose="02020603050405020304" pitchFamily="18" charset="0"/>
                       </a:endParaRPr>
                     </a:p>
                   </a:txBody>
-                  <a:tcPr marL="0" marR="0" marT="0" marB="0" anchor="ctr">
+                  <a:tcPr marL="9525" marR="9525" marT="9525" marB="0" anchor="ctr">
                     <a:lnL w="12700" cap="flat" cmpd="sng" algn="ctr">
                       <a:solidFill>
                         <a:schemeClr val="tx1"/>
@@ -9637,23 +9665,30 @@
                     <a:bodyPr/>
                     <a:lstStyle/>
                     <a:p>
-                      <a:pPr marL="3810" algn="ctr">
-                        <a:lnSpc>
-                          <a:spcPts val="1800"/>
-                        </a:lnSpc>
+                      <a:pPr algn="ctr">
+                        <a:buNone/>
                       </a:pPr>
-                      <a:endParaRPr lang="es-MX" sz="1400" b="0" dirty="0">
-                        <a:solidFill>
-                          <a:schemeClr val="tx1"/>
-                        </a:solidFill>
+                      <a:r>
+                        <a:rPr lang="es-MX" sz="1100" b="1" spc="-5">
+                          <a:solidFill>
+                            <a:srgbClr val="2C3A45"/>
+                          </a:solidFill>
+                          <a:effectLst/>
+                          <a:latin typeface="Arial" panose="020B0604020202020204" pitchFamily="34" charset="0"/>
+                          <a:ea typeface="Calibri" panose="020F0502020204030204" pitchFamily="34" charset="0"/>
+                          <a:cs typeface="Times New Roman" panose="02020603050405020304" pitchFamily="18" charset="0"/>
+                        </a:rPr>
+                        <a:t>30</a:t>
+                      </a:r>
+                      <a:endParaRPr lang="es-MX" sz="1100">
                         <a:effectLst/>
-                        <a:latin typeface="Arial" panose="020B0604020202020204" pitchFamily="34" charset="0"/>
+                        <a:latin typeface="Calibri" panose="020F0502020204030204" pitchFamily="34" charset="0"/>
                         <a:ea typeface="Calibri" panose="020F0502020204030204" pitchFamily="34" charset="0"/>
-                        <a:cs typeface="Arial" panose="020B0604020202020204" pitchFamily="34" charset="0"/>
+                        <a:cs typeface="Times New Roman" panose="02020603050405020304" pitchFamily="18" charset="0"/>
                       </a:endParaRPr>
                     </a:p>
                   </a:txBody>
-                  <a:tcPr marL="0" marR="0" marT="0" marB="0" anchor="ctr">
+                  <a:tcPr marL="9525" marR="9525" marT="9525" marB="0" anchor="ctr">
                     <a:lnL w="12700" cap="flat" cmpd="sng" algn="ctr">
                       <a:solidFill>
                         <a:schemeClr val="tx1"/>
@@ -9698,23 +9733,30 @@
                     <a:bodyPr/>
                     <a:lstStyle/>
                     <a:p>
-                      <a:pPr marL="5080" algn="ctr">
-                        <a:lnSpc>
-                          <a:spcPts val="1800"/>
-                        </a:lnSpc>
+                      <a:pPr algn="ctr">
+                        <a:buNone/>
                       </a:pPr>
-                      <a:endParaRPr lang="es-MX" sz="1400" b="0" dirty="0">
-                        <a:solidFill>
-                          <a:schemeClr val="tx1"/>
-                        </a:solidFill>
+                      <a:r>
+                        <a:rPr lang="es-MX" sz="1100" b="1" spc="-5">
+                          <a:solidFill>
+                            <a:srgbClr val="2C3A45"/>
+                          </a:solidFill>
+                          <a:effectLst/>
+                          <a:latin typeface="Arial" panose="020B0604020202020204" pitchFamily="34" charset="0"/>
+                          <a:ea typeface="Calibri" panose="020F0502020204030204" pitchFamily="34" charset="0"/>
+                          <a:cs typeface="Times New Roman" panose="02020603050405020304" pitchFamily="18" charset="0"/>
+                        </a:rPr>
+                        <a:t>5</a:t>
+                      </a:r>
+                      <a:endParaRPr lang="es-MX" sz="1100">
                         <a:effectLst/>
-                        <a:latin typeface="Arial" panose="020B0604020202020204" pitchFamily="34" charset="0"/>
+                        <a:latin typeface="Calibri" panose="020F0502020204030204" pitchFamily="34" charset="0"/>
                         <a:ea typeface="Calibri" panose="020F0502020204030204" pitchFamily="34" charset="0"/>
-                        <a:cs typeface="Arial" panose="020B0604020202020204" pitchFamily="34" charset="0"/>
+                        <a:cs typeface="Times New Roman" panose="02020603050405020304" pitchFamily="18" charset="0"/>
                       </a:endParaRPr>
                     </a:p>
                   </a:txBody>
-                  <a:tcPr marL="0" marR="0" marT="0" marB="0" anchor="ctr">
+                  <a:tcPr marL="9525" marR="9525" marT="9525" marB="0" anchor="ctr">
                     <a:lnL w="12700" cap="flat" cmpd="sng" algn="ctr">
                       <a:solidFill>
                         <a:schemeClr val="tx1"/>
@@ -10077,23 +10119,30 @@
                     <a:bodyPr/>
                     <a:lstStyle/>
                     <a:p>
-                      <a:pPr marL="3810" algn="ctr">
-                        <a:lnSpc>
-                          <a:spcPts val="1800"/>
-                        </a:lnSpc>
+                      <a:pPr algn="ctr">
+                        <a:buNone/>
                       </a:pPr>
-                      <a:endParaRPr lang="es-MX" sz="1400" b="0" dirty="0">
-                        <a:solidFill>
-                          <a:schemeClr val="tx1"/>
-                        </a:solidFill>
+                      <a:r>
+                        <a:rPr lang="es-MX" sz="1100" b="1" spc="-5">
+                          <a:solidFill>
+                            <a:srgbClr val="2C3A45"/>
+                          </a:solidFill>
+                          <a:effectLst/>
+                          <a:latin typeface="Arial" panose="020B0604020202020204" pitchFamily="34" charset="0"/>
+                          <a:ea typeface="Calibri" panose="020F0502020204030204" pitchFamily="34" charset="0"/>
+                          <a:cs typeface="Times New Roman" panose="02020603050405020304" pitchFamily="18" charset="0"/>
+                        </a:rPr>
+                        <a:t>1</a:t>
+                      </a:r>
+                      <a:endParaRPr lang="es-MX" sz="1100">
                         <a:effectLst/>
-                        <a:latin typeface="Arial" panose="020B0604020202020204" pitchFamily="34" charset="0"/>
+                        <a:latin typeface="Calibri" panose="020F0502020204030204" pitchFamily="34" charset="0"/>
                         <a:ea typeface="Calibri" panose="020F0502020204030204" pitchFamily="34" charset="0"/>
-                        <a:cs typeface="Arial" panose="020B0604020202020204" pitchFamily="34" charset="0"/>
+                        <a:cs typeface="Times New Roman" panose="02020603050405020304" pitchFamily="18" charset="0"/>
                       </a:endParaRPr>
                     </a:p>
                   </a:txBody>
-                  <a:tcPr marL="0" marR="0" marT="0" marB="0" anchor="ctr">
+                  <a:tcPr marL="9525" marR="9525" marT="9525" marB="0" anchor="ctr">
                     <a:lnL w="12700" cap="flat" cmpd="sng" algn="ctr">
                       <a:solidFill>
                         <a:schemeClr val="tx1"/>
@@ -10138,23 +10187,18 @@
                     <a:bodyPr/>
                     <a:lstStyle/>
                     <a:p>
-                      <a:pPr marL="5080" algn="ctr">
-                        <a:lnSpc>
-                          <a:spcPts val="1800"/>
-                        </a:lnSpc>
+                      <a:pPr algn="ctr">
+                        <a:buNone/>
                       </a:pPr>
-                      <a:endParaRPr lang="es-MX" sz="1400" b="0" dirty="0">
-                        <a:solidFill>
-                          <a:schemeClr val="tx1"/>
-                        </a:solidFill>
+                      <a:endParaRPr lang="es-MX" sz="1100" dirty="0">
                         <a:effectLst/>
-                        <a:latin typeface="Arial" panose="020B0604020202020204" pitchFamily="34" charset="0"/>
+                        <a:latin typeface="Calibri" panose="020F0502020204030204" pitchFamily="34" charset="0"/>
                         <a:ea typeface="Calibri" panose="020F0502020204030204" pitchFamily="34" charset="0"/>
-                        <a:cs typeface="Arial" panose="020B0604020202020204" pitchFamily="34" charset="0"/>
+                        <a:cs typeface="Times New Roman" panose="02020603050405020304" pitchFamily="18" charset="0"/>
                       </a:endParaRPr>
                     </a:p>
                   </a:txBody>
-                  <a:tcPr marL="0" marR="0" marT="0" marB="0" anchor="ctr">
+                  <a:tcPr marL="9525" marR="9525" marT="9525" marB="0" anchor="ctr">
                     <a:lnL w="12700" cap="flat" cmpd="sng" algn="ctr">
                       <a:solidFill>
                         <a:schemeClr val="tx1"/>
